--- a/artifacts/organization_20261031/Figure01_Organization.pptx
+++ b/artifacts/organization_20261031/Figure01_Organization.pptx
@@ -7,7 +7,7 @@
   <p:sldIdLst>
     <p:sldId id="256" r:id="rId7"/>
   </p:sldIdLst>
-  <p:sldSz cx="12801600" cy="5989320" type="screen4x3"/>
+  <p:sldSz cx="13030200" cy="4343400" type="screen4x3"/>
   <p:notesSz cx="6858000" cy="9144000"/>
   <p:defaultTextStyle>
     <a:defPPr>
@@ -3104,8 +3104,8 @@
         </p:nvSpPr>
         <p:spPr>
           <a:xfrm>
-            <a:off x="274320" y="292608"/>
-            <a:ext cx="1325880" cy="822960"/>
+            <a:off x="320040" y="228600"/>
+            <a:ext cx="2286000" cy="457200"/>
           </a:xfrm>
           <a:prstGeom prst="rect">
             <a:avLst/>
@@ -3113,20 +3113,20 @@
           <a:noFill/>
         </p:spPr>
         <p:txBody>
-          <a:bodyPr wrap="square" anchor="ctr" lIns="128016" rIns="128016" tIns="54864" bIns="54864">
+          <a:bodyPr wrap="square" anchor="ctr">
             <a:spAutoFit/>
           </a:bodyPr>
           <a:lstStyle/>
           <a:p>
-            <a:pPr algn="l"/>
-            <a:r>
-              <a:rPr sz="1450" b="1">
+            <a:pPr algn="ctr"/>
+            <a:r>
+              <a:rPr sz="2000" b="1">
                 <a:solidFill>
-                  <a:srgbClr val="5C5C5C"/>
+                  <a:srgbClr val="304B63"/>
                 </a:solidFill>
-                <a:latin typeface="Times New Roman"/>
+                <a:latin typeface="Comic Sans MS"/>
               </a:rPr>
-              <a:t>Foundations</a:t>
+              <a:t>Define</a:t>
             </a:r>
           </a:p>
         </p:txBody>
@@ -3139,21 +3139,22 @@
         </p:nvSpPr>
         <p:spPr>
           <a:xfrm>
-            <a:off x="1600200" y="274320"/>
-            <a:ext cx="4846320" cy="868680"/>
+            <a:off x="320040" y="868680"/>
+            <a:ext cx="2286000" cy="1143000"/>
           </a:xfrm>
           <a:prstGeom prst="roundRect">
             <a:avLst>
-              <a:gd name="adj" fmla="val 8000"/>
+              <a:gd name="adj" fmla="val 12000"/>
             </a:avLst>
           </a:prstGeom>
           <a:solidFill>
-            <a:srgbClr val="FFFFFF"/>
+            <a:srgbClr val="F1F1EE"/>
           </a:solidFill>
-          <a:ln w="15875">
+          <a:ln w="25400">
             <a:solidFill>
-              <a:srgbClr val="6B6B6B"/>
+              <a:srgbClr val="304B63"/>
             </a:solidFill>
+            <a:prstDash val="dash"/>
           </a:ln>
           <a:effectLst/>
         </p:spPr>
@@ -3172,62 +3173,58 @@
           </a:fontRef>
         </p:style>
         <p:txBody>
-          <a:bodyPr rtlCol="0" anchor="ctr" wrap="square" lIns="128016" rIns="128016" tIns="54864" bIns="54864"/>
-          <a:lstStyle/>
-          <a:p>
-            <a:pPr algn="l"/>
-            <a:r>
-              <a:rPr sz="1850" b="1">
+          <a:bodyPr rtlCol="0" anchor="ctr" wrap="square"/>
+          <a:lstStyle/>
+          <a:p>
+            <a:pPr algn="ctr"/>
+            <a:r>
+              <a:rPr sz="1700" b="1">
                 <a:solidFill>
-                  <a:srgbClr val="6B6B6B"/>
+                  <a:srgbClr val="304B63"/>
                 </a:solidFill>
-                <a:latin typeface="Times New Roman"/>
+                <a:latin typeface="Comic Sans MS"/>
               </a:rPr>
-              <a:t>§1  </a:t>
-            </a:r>
-            <a:r>
-              <a:rPr sz="1850" b="1">
+              <a:t>§ 1</a:t>
+            </a:r>
+          </a:p>
+          <a:p>
+            <a:pPr algn="ctr"/>
+            <a:r>
+              <a:rPr sz="1700" b="1">
                 <a:solidFill>
-                  <a:srgbClr val="222222"/>
+                  <a:srgbClr val="1F1F1F"/>
                 </a:solidFill>
-                <a:latin typeface="Times New Roman"/>
+                <a:latin typeface="Comic Sans MS"/>
               </a:rPr>
               <a:t>Introduction</a:t>
             </a:r>
           </a:p>
-          <a:p>
-            <a:pPr algn="l"/>
-            <a:r>
-              <a:rPr sz="1450" b="0">
-                <a:solidFill>
-                  <a:srgbClr val="5C5C5C"/>
-                </a:solidFill>
-                <a:latin typeface="Times New Roman"/>
-              </a:rPr>
-              <a:t>construction question · taxonomy · contributions</a:t>
-            </a:r>
-          </a:p>
-        </p:txBody>
-      </p:sp>
-      <p:sp>
-        <p:nvSpPr>
-          <p:cNvPr id="4" name="Rectangle 3"/>
+        </p:txBody>
+      </p:sp>
+      <p:sp>
+        <p:nvSpPr>
+          <p:cNvPr id="4" name="Rounded Rectangle 3"/>
           <p:cNvSpPr/>
           <p:nvPr/>
         </p:nvSpPr>
         <p:spPr>
           <a:xfrm>
-            <a:off x="1618488" y="384048"/>
-            <a:ext cx="64008" cy="649224"/>
+            <a:off x="320040" y="2240280"/>
+            <a:ext cx="2286000" cy="1280160"/>
           </a:xfrm>
-          <a:prstGeom prst="rect">
-            <a:avLst/>
+          <a:prstGeom prst="roundRect">
+            <a:avLst>
+              <a:gd name="adj" fmla="val 12000"/>
+            </a:avLst>
           </a:prstGeom>
           <a:solidFill>
-            <a:srgbClr val="6B6B6B"/>
+            <a:srgbClr val="F1F1EE"/>
           </a:solidFill>
-          <a:ln>
-            <a:noFill/>
+          <a:ln w="25400">
+            <a:solidFill>
+              <a:srgbClr val="304B63"/>
+            </a:solidFill>
+            <a:prstDash val="dash"/>
           </a:ln>
           <a:effectLst/>
         </p:spPr>
@@ -3246,180 +3243,44 @@
           </a:fontRef>
         </p:style>
         <p:txBody>
-          <a:bodyPr rtlCol="0" anchor="ctr"/>
+          <a:bodyPr rtlCol="0" anchor="ctr" wrap="square"/>
           <a:lstStyle/>
           <a:p>
             <a:pPr algn="ctr"/>
-          </a:p>
-        </p:txBody>
-      </p:sp>
-      <p:sp>
-        <p:nvSpPr>
-          <p:cNvPr id="5" name="Rounded Rectangle 4"/>
-          <p:cNvSpPr/>
+            <a:r>
+              <a:rPr sz="1700" b="1">
+                <a:solidFill>
+                  <a:srgbClr val="304B63"/>
+                </a:solidFill>
+                <a:latin typeface="Comic Sans MS"/>
+              </a:rPr>
+              <a:t>§ 2</a:t>
+            </a:r>
+          </a:p>
+          <a:p>
+            <a:pPr algn="ctr"/>
+            <a:r>
+              <a:rPr sz="1700" b="1">
+                <a:solidFill>
+                  <a:srgbClr val="1F1F1F"/>
+                </a:solidFill>
+                <a:latin typeface="Comic Sans MS"/>
+              </a:rPr>
+              <a:t>What Is a Time Series Agent?</a:t>
+            </a:r>
+          </a:p>
+        </p:txBody>
+      </p:sp>
+      <p:sp>
+        <p:nvSpPr>
+          <p:cNvPr id="5" name="TextBox 4"/>
+          <p:cNvSpPr txBox="1"/>
           <p:nvPr/>
         </p:nvSpPr>
         <p:spPr>
           <a:xfrm>
-            <a:off x="6629400" y="274320"/>
-            <a:ext cx="5897879" cy="868680"/>
-          </a:xfrm>
-          <a:prstGeom prst="roundRect">
-            <a:avLst>
-              <a:gd name="adj" fmla="val 8000"/>
-            </a:avLst>
-          </a:prstGeom>
-          <a:solidFill>
-            <a:srgbClr val="FFFFFF"/>
-          </a:solidFill>
-          <a:ln w="15875">
-            <a:solidFill>
-              <a:srgbClr val="6B6B6B"/>
-            </a:solidFill>
-          </a:ln>
-          <a:effectLst/>
-        </p:spPr>
-        <p:style>
-          <a:lnRef idx="1">
-            <a:schemeClr val="accent1"/>
-          </a:lnRef>
-          <a:fillRef idx="3">
-            <a:schemeClr val="accent1"/>
-          </a:fillRef>
-          <a:effectRef idx="2">
-            <a:schemeClr val="accent1"/>
-          </a:effectRef>
-          <a:fontRef idx="minor">
-            <a:schemeClr val="lt1"/>
-          </a:fontRef>
-        </p:style>
-        <p:txBody>
-          <a:bodyPr rtlCol="0" anchor="ctr" wrap="square" lIns="128016" rIns="128016" tIns="54864" bIns="54864"/>
-          <a:lstStyle/>
-          <a:p>
-            <a:pPr algn="l"/>
-            <a:r>
-              <a:rPr sz="1850" b="1">
-                <a:solidFill>
-                  <a:srgbClr val="6B6B6B"/>
-                </a:solidFill>
-                <a:latin typeface="Times New Roman"/>
-              </a:rPr>
-              <a:t>§2  </a:t>
-            </a:r>
-            <a:r>
-              <a:rPr sz="1850" b="1">
-                <a:solidFill>
-                  <a:srgbClr val="222222"/>
-                </a:solidFill>
-                <a:latin typeface="Times New Roman"/>
-              </a:rPr>
-              <a:t>What Is a Time Series Agent?</a:t>
-            </a:r>
-          </a:p>
-          <a:p>
-            <a:pPr algn="l"/>
-            <a:r>
-              <a:rPr sz="1450" b="0">
-                <a:solidFill>
-                  <a:srgbClr val="5C5C5C"/>
-                </a:solidFill>
-                <a:latin typeface="Times New Roman"/>
-              </a:rPr>
-              <a:t>definition · scope of inclusion · layer assignment</a:t>
-            </a:r>
-          </a:p>
-        </p:txBody>
-      </p:sp>
-      <p:sp>
-        <p:nvSpPr>
-          <p:cNvPr id="6" name="Rectangle 5"/>
-          <p:cNvSpPr/>
-          <p:nvPr/>
-        </p:nvSpPr>
-        <p:spPr>
-          <a:xfrm>
-            <a:off x="6647688" y="384048"/>
-            <a:ext cx="64008" cy="649224"/>
-          </a:xfrm>
-          <a:prstGeom prst="rect">
-            <a:avLst/>
-          </a:prstGeom>
-          <a:solidFill>
-            <a:srgbClr val="6B6B6B"/>
-          </a:solidFill>
-          <a:ln>
-            <a:noFill/>
-          </a:ln>
-          <a:effectLst/>
-        </p:spPr>
-        <p:style>
-          <a:lnRef idx="1">
-            <a:schemeClr val="accent1"/>
-          </a:lnRef>
-          <a:fillRef idx="3">
-            <a:schemeClr val="accent1"/>
-          </a:fillRef>
-          <a:effectRef idx="2">
-            <a:schemeClr val="accent1"/>
-          </a:effectRef>
-          <a:fontRef idx="minor">
-            <a:schemeClr val="lt1"/>
-          </a:fontRef>
-        </p:style>
-        <p:txBody>
-          <a:bodyPr rtlCol="0" anchor="ctr"/>
-          <a:lstStyle/>
-          <a:p>
-            <a:pPr algn="ctr"/>
-          </a:p>
-        </p:txBody>
-      </p:sp>
-      <p:cxnSp>
-        <p:nvCxnSpPr>
-          <p:cNvPr id="7" name="Connector 6"/>
-          <p:cNvCxnSpPr/>
-          <p:nvPr/>
-        </p:nvCxnSpPr>
-        <p:spPr>
-          <a:xfrm>
-            <a:off x="274320" y="1325880"/>
-            <a:ext cx="12252960" cy="0"/>
-          </a:xfrm>
-          <a:prstGeom prst="line">
-            <a:avLst/>
-          </a:prstGeom>
-          <a:ln w="9525">
-            <a:solidFill>
-              <a:srgbClr val="C9C9C9"/>
-            </a:solidFill>
-          </a:ln>
-        </p:spPr>
-        <p:style>
-          <a:lnRef idx="2">
-            <a:schemeClr val="accent1"/>
-          </a:lnRef>
-          <a:fillRef idx="0">
-            <a:schemeClr val="accent1"/>
-          </a:fillRef>
-          <a:effectRef idx="1">
-            <a:schemeClr val="accent1"/>
-          </a:effectRef>
-          <a:fontRef idx="minor">
-            <a:schemeClr val="tx1"/>
-          </a:fontRef>
-        </p:style>
-      </p:cxnSp>
-      <p:sp>
-        <p:nvSpPr>
-          <p:cNvPr id="8" name="TextBox 7"/>
-          <p:cNvSpPr txBox="1"/>
-          <p:nvPr/>
-        </p:nvSpPr>
-        <p:spPr>
-          <a:xfrm>
-            <a:off x="274320" y="2286000"/>
-            <a:ext cx="1325880" cy="822960"/>
+            <a:off x="3063240" y="228600"/>
+            <a:ext cx="5166360" cy="457200"/>
           </a:xfrm>
           <a:prstGeom prst="rect">
             <a:avLst/>
@@ -3427,114 +3288,44 @@
           <a:noFill/>
         </p:spPr>
         <p:txBody>
-          <a:bodyPr wrap="square" anchor="ctr" lIns="128016" rIns="128016" tIns="54864" bIns="54864">
+          <a:bodyPr wrap="square" anchor="ctr">
             <a:spAutoFit/>
           </a:bodyPr>
           <a:lstStyle/>
           <a:p>
-            <a:pPr algn="l"/>
-            <a:r>
-              <a:rPr sz="1450" b="1">
+            <a:pPr algn="ctr"/>
+            <a:r>
+              <a:rPr sz="2000" b="1">
                 <a:solidFill>
-                  <a:srgbClr val="5C5C5C"/>
+                  <a:srgbClr val="304B63"/>
                 </a:solidFill>
-                <a:latin typeface="Times New Roman"/>
+                <a:latin typeface="Comic Sans MS"/>
               </a:rPr>
-              <a:t>Components</a:t>
-            </a:r>
-          </a:p>
-        </p:txBody>
-      </p:sp>
-      <p:sp>
-        <p:nvSpPr>
-          <p:cNvPr id="9" name="TextBox 8"/>
-          <p:cNvSpPr txBox="1"/>
+              <a:t>Build</a:t>
+            </a:r>
+          </a:p>
+        </p:txBody>
+      </p:sp>
+      <p:sp>
+        <p:nvSpPr>
+          <p:cNvPr id="6" name="Rounded Rectangle 5"/>
+          <p:cNvSpPr/>
           <p:nvPr/>
         </p:nvSpPr>
         <p:spPr>
           <a:xfrm>
-            <a:off x="1472184" y="1417320"/>
-            <a:ext cx="2468880" cy="365760"/>
-          </a:xfrm>
-          <a:prstGeom prst="rect">
-            <a:avLst/>
-          </a:prstGeom>
-          <a:noFill/>
-        </p:spPr>
-        <p:txBody>
-          <a:bodyPr wrap="square" anchor="ctr" lIns="128016" rIns="128016" tIns="54864" bIns="54864">
-            <a:spAutoFit/>
-          </a:bodyPr>
-          <a:lstStyle/>
-          <a:p>
-            <a:pPr algn="l"/>
-            <a:r>
-              <a:rPr sz="1450" b="1">
-                <a:solidFill>
-                  <a:srgbClr val="5C5C5C"/>
-                </a:solidFill>
-                <a:latin typeface="Times New Roman"/>
-              </a:rPr>
-              <a:t>LLMs</a:t>
-            </a:r>
-          </a:p>
-        </p:txBody>
-      </p:sp>
-      <p:sp>
-        <p:nvSpPr>
-          <p:cNvPr id="10" name="TextBox 9"/>
-          <p:cNvSpPr txBox="1"/>
-          <p:nvPr/>
-        </p:nvSpPr>
-        <p:spPr>
-          <a:xfrm>
-            <a:off x="4215384" y="1417320"/>
-            <a:ext cx="8183879" cy="365760"/>
-          </a:xfrm>
-          <a:prstGeom prst="rect">
-            <a:avLst/>
-          </a:prstGeom>
-          <a:noFill/>
-        </p:spPr>
-        <p:txBody>
-          <a:bodyPr wrap="square" anchor="ctr" lIns="128016" rIns="128016" tIns="54864" bIns="54864">
-            <a:spAutoFit/>
-          </a:bodyPr>
-          <a:lstStyle/>
-          <a:p>
-            <a:pPr algn="l"/>
-            <a:r>
-              <a:rPr sz="1450" b="1">
-                <a:solidFill>
-                  <a:srgbClr val="5C5C5C"/>
-                </a:solidFill>
-                <a:latin typeface="Times New Roman"/>
-              </a:rPr>
-              <a:t>Harness architectures, from general to specific</a:t>
-            </a:r>
-          </a:p>
-        </p:txBody>
-      </p:sp>
-      <p:sp>
-        <p:nvSpPr>
-          <p:cNvPr id="11" name="Rounded Rectangle 10"/>
-          <p:cNvSpPr/>
-          <p:nvPr/>
-        </p:nvSpPr>
-        <p:spPr>
-          <a:xfrm>
-            <a:off x="1600200" y="1828800"/>
-            <a:ext cx="2468880" cy="1783080"/>
+            <a:off x="3063240" y="868680"/>
+            <a:ext cx="1325880" cy="2651760"/>
           </a:xfrm>
           <a:prstGeom prst="roundRect">
             <a:avLst>
-              <a:gd name="adj" fmla="val 8000"/>
+              <a:gd name="adj" fmla="val 12000"/>
             </a:avLst>
           </a:prstGeom>
           <a:solidFill>
-            <a:srgbClr val="FFFFFF"/>
+            <a:srgbClr val="FBF0DA"/>
           </a:solidFill>
-          <a:ln w="15875">
+          <a:ln w="25400">
             <a:solidFill>
               <a:srgbClr val="E8A033"/>
             </a:solidFill>
@@ -3556,131 +3347,54 @@
           </a:fontRef>
         </p:style>
         <p:txBody>
-          <a:bodyPr rtlCol="0" anchor="t" wrap="square" lIns="128016" rIns="128016" tIns="54864" bIns="54864"/>
-          <a:lstStyle/>
-          <a:p>
-            <a:pPr algn="l"/>
-            <a:r>
-              <a:rPr sz="1850" b="1">
+          <a:bodyPr rtlCol="0" anchor="ctr" wrap="square"/>
+          <a:lstStyle/>
+          <a:p>
+            <a:pPr algn="ctr"/>
+            <a:r>
+              <a:rPr sz="1700" b="1">
                 <a:solidFill>
                   <a:srgbClr val="E8A033"/>
                 </a:solidFill>
-                <a:latin typeface="Times New Roman"/>
+                <a:latin typeface="Comic Sans MS"/>
               </a:rPr>
-              <a:t>§3  </a:t>
-            </a:r>
-            <a:r>
-              <a:rPr sz="1850" b="1">
+              <a:t>§ 3</a:t>
+            </a:r>
+          </a:p>
+          <a:p>
+            <a:pPr algn="ctr"/>
+            <a:r>
+              <a:rPr sz="1700" b="1">
                 <a:solidFill>
-                  <a:srgbClr val="222222"/>
+                  <a:srgbClr val="1F1F1F"/>
                 </a:solidFill>
-                <a:latin typeface="Times New Roman"/>
+                <a:latin typeface="Comic Sans MS"/>
               </a:rPr>
-              <a:t>LLM-Side</a:t>
-            </a:r>
-          </a:p>
-          <a:p>
-            <a:pPr algn="l"/>
-            <a:r>
-              <a:rPr sz="1450" b="0">
-                <a:solidFill>
-                  <a:srgbClr val="5C5C5C"/>
-                </a:solidFill>
-                <a:latin typeface="Times New Roman"/>
-              </a:rPr>
-              <a:t>temporal representation</a:t>
-            </a:r>
-          </a:p>
-          <a:p>
-            <a:pPr algn="l"/>
-            <a:r>
-              <a:rPr sz="1450" b="0">
-                <a:solidFill>
-                  <a:srgbClr val="5C5C5C"/>
-                </a:solidFill>
-                <a:latin typeface="Times New Roman"/>
-              </a:rPr>
-              <a:t>instruction and reasoning</a:t>
-            </a:r>
-          </a:p>
-          <a:p>
-            <a:pPr algn="l"/>
-            <a:r>
-              <a:rPr sz="1450" b="0">
-                <a:solidFill>
-                  <a:srgbClr val="5C5C5C"/>
-                </a:solidFill>
-                <a:latin typeface="Times New Roman"/>
-              </a:rPr>
-              <a:t>workflow learning</a:t>
-            </a:r>
-          </a:p>
-        </p:txBody>
-      </p:sp>
-      <p:sp>
-        <p:nvSpPr>
-          <p:cNvPr id="12" name="Rectangle 11"/>
+              <a:t>LLM side</a:t>
+            </a:r>
+          </a:p>
+        </p:txBody>
+      </p:sp>
+      <p:sp>
+        <p:nvSpPr>
+          <p:cNvPr id="7" name="Rounded Rectangle 6"/>
           <p:cNvSpPr/>
           <p:nvPr/>
         </p:nvSpPr>
         <p:spPr>
           <a:xfrm>
-            <a:off x="1618488" y="1938528"/>
-            <a:ext cx="64008" cy="1563624"/>
-          </a:xfrm>
-          <a:prstGeom prst="rect">
-            <a:avLst/>
-          </a:prstGeom>
-          <a:solidFill>
-            <a:srgbClr val="E8A033"/>
-          </a:solidFill>
-          <a:ln>
-            <a:noFill/>
-          </a:ln>
-          <a:effectLst/>
-        </p:spPr>
-        <p:style>
-          <a:lnRef idx="1">
-            <a:schemeClr val="accent1"/>
-          </a:lnRef>
-          <a:fillRef idx="3">
-            <a:schemeClr val="accent1"/>
-          </a:fillRef>
-          <a:effectRef idx="2">
-            <a:schemeClr val="accent1"/>
-          </a:effectRef>
-          <a:fontRef idx="minor">
-            <a:schemeClr val="lt1"/>
-          </a:fontRef>
-        </p:style>
-        <p:txBody>
-          <a:bodyPr rtlCol="0" anchor="ctr"/>
-          <a:lstStyle/>
-          <a:p>
-            <a:pPr algn="ctr"/>
-          </a:p>
-        </p:txBody>
-      </p:sp>
-      <p:sp>
-        <p:nvSpPr>
-          <p:cNvPr id="13" name="Rounded Rectangle 12"/>
-          <p:cNvSpPr/>
-          <p:nvPr/>
-        </p:nvSpPr>
-        <p:spPr>
-          <a:xfrm>
-            <a:off x="4343400" y="1828800"/>
-            <a:ext cx="2697480" cy="1783080"/>
+            <a:off x="4526280" y="868680"/>
+            <a:ext cx="3246120" cy="749808"/>
           </a:xfrm>
           <a:prstGeom prst="roundRect">
             <a:avLst>
-              <a:gd name="adj" fmla="val 8000"/>
+              <a:gd name="adj" fmla="val 12000"/>
             </a:avLst>
           </a:prstGeom>
           <a:solidFill>
-            <a:srgbClr val="FFFFFF"/>
+            <a:srgbClr val="E5EAF4"/>
           </a:solidFill>
-          <a:ln w="15875">
+          <a:ln w="25400">
             <a:solidFill>
               <a:srgbClr val="3A5398"/>
             </a:solidFill>
@@ -3702,155 +3416,51 @@
           </a:fontRef>
         </p:style>
         <p:txBody>
-          <a:bodyPr rtlCol="0" anchor="t" wrap="square" lIns="128016" rIns="128016" tIns="54864" bIns="54864"/>
-          <a:lstStyle/>
-          <a:p>
-            <a:pPr algn="l"/>
-            <a:r>
-              <a:rPr sz="1850" b="1">
+          <a:bodyPr rtlCol="0" anchor="ctr" wrap="square"/>
+          <a:lstStyle/>
+          <a:p>
+            <a:pPr algn="ctr"/>
+            <a:r>
+              <a:rPr sz="1700" b="1">
                 <a:solidFill>
                   <a:srgbClr val="3A5398"/>
                 </a:solidFill>
-                <a:latin typeface="Times New Roman"/>
+                <a:latin typeface="Comic Sans MS"/>
               </a:rPr>
-              <a:t>§4  </a:t>
-            </a:r>
-            <a:r>
-              <a:rPr sz="1850" b="1">
+              <a:t>§ 4  </a:t>
+            </a:r>
+            <a:r>
+              <a:rPr sz="1700" b="1">
                 <a:solidFill>
-                  <a:srgbClr val="222222"/>
+                  <a:srgbClr val="1F1F1F"/>
                 </a:solidFill>
-                <a:latin typeface="Times New Roman"/>
+                <a:latin typeface="Comic Sans MS"/>
               </a:rPr>
               <a:t>General Harness</a:t>
             </a:r>
           </a:p>
-          <a:p>
-            <a:pPr algn="l"/>
-            <a:r>
-              <a:rPr sz="1450" b="0">
-                <a:solidFill>
-                  <a:srgbClr val="5C5C5C"/>
-                </a:solidFill>
-                <a:latin typeface="Times New Roman"/>
-              </a:rPr>
-              <a:t>interface and interaction</a:t>
-            </a:r>
-          </a:p>
-          <a:p>
-            <a:pPr algn="l"/>
-            <a:r>
-              <a:rPr sz="1450" b="0">
-                <a:solidFill>
-                  <a:srgbClr val="5C5C5C"/>
-                </a:solidFill>
-                <a:latin typeface="Times New Roman"/>
-              </a:rPr>
-              <a:t>memory and context</a:t>
-            </a:r>
-          </a:p>
-          <a:p>
-            <a:pPr algn="l"/>
-            <a:r>
-              <a:rPr sz="1450" b="0">
-                <a:solidFill>
-                  <a:srgbClr val="5C5C5C"/>
-                </a:solidFill>
-                <a:latin typeface="Times New Roman"/>
-              </a:rPr>
-              <a:t>tools and execution</a:t>
-            </a:r>
-          </a:p>
-          <a:p>
-            <a:pPr algn="l"/>
-            <a:r>
-              <a:rPr sz="1450" b="0">
-                <a:solidFill>
-                  <a:srgbClr val="5C5C5C"/>
-                </a:solidFill>
-                <a:latin typeface="Times New Roman"/>
-              </a:rPr>
-              <a:t>planning and orchestration</a:t>
-            </a:r>
-          </a:p>
-          <a:p>
-            <a:pPr algn="l"/>
-            <a:r>
-              <a:rPr sz="1450" b="0">
-                <a:solidFill>
-                  <a:srgbClr val="5C5C5C"/>
-                </a:solidFill>
-                <a:latin typeface="Times New Roman"/>
-              </a:rPr>
-              <a:t>optimization and evolution</a:t>
-            </a:r>
-          </a:p>
-        </p:txBody>
-      </p:sp>
-      <p:sp>
-        <p:nvSpPr>
-          <p:cNvPr id="14" name="Rectangle 13"/>
+        </p:txBody>
+      </p:sp>
+      <p:sp>
+        <p:nvSpPr>
+          <p:cNvPr id="8" name="Rounded Rectangle 7"/>
           <p:cNvSpPr/>
           <p:nvPr/>
         </p:nvSpPr>
         <p:spPr>
           <a:xfrm>
-            <a:off x="4361688" y="1938528"/>
-            <a:ext cx="64008" cy="1563624"/>
-          </a:xfrm>
-          <a:prstGeom prst="rect">
-            <a:avLst/>
-          </a:prstGeom>
-          <a:solidFill>
-            <a:srgbClr val="3A5398"/>
-          </a:solidFill>
-          <a:ln>
-            <a:noFill/>
-          </a:ln>
-          <a:effectLst/>
-        </p:spPr>
-        <p:style>
-          <a:lnRef idx="1">
-            <a:schemeClr val="accent1"/>
-          </a:lnRef>
-          <a:fillRef idx="3">
-            <a:schemeClr val="accent1"/>
-          </a:fillRef>
-          <a:effectRef idx="2">
-            <a:schemeClr val="accent1"/>
-          </a:effectRef>
-          <a:fontRef idx="minor">
-            <a:schemeClr val="lt1"/>
-          </a:fontRef>
-        </p:style>
-        <p:txBody>
-          <a:bodyPr rtlCol="0" anchor="ctr"/>
-          <a:lstStyle/>
-          <a:p>
-            <a:pPr algn="ctr"/>
-          </a:p>
-        </p:txBody>
-      </p:sp>
-      <p:sp>
-        <p:nvSpPr>
-          <p:cNvPr id="15" name="Rounded Rectangle 14"/>
-          <p:cNvSpPr/>
-          <p:nvPr/>
-        </p:nvSpPr>
-        <p:spPr>
-          <a:xfrm>
-            <a:off x="7388352" y="1828800"/>
-            <a:ext cx="2423160" cy="1783080"/>
+            <a:off x="4526280" y="1819656"/>
+            <a:ext cx="3246120" cy="749808"/>
           </a:xfrm>
           <a:prstGeom prst="roundRect">
             <a:avLst>
-              <a:gd name="adj" fmla="val 8000"/>
+              <a:gd name="adj" fmla="val 12000"/>
             </a:avLst>
           </a:prstGeom>
           <a:solidFill>
-            <a:srgbClr val="FFFFFF"/>
+            <a:srgbClr val="DDF2EC"/>
           </a:solidFill>
-          <a:ln w="15875">
+          <a:ln w="25400">
             <a:solidFill>
               <a:srgbClr val="00A087"/>
             </a:solidFill>
@@ -3872,143 +3482,51 @@
           </a:fontRef>
         </p:style>
         <p:txBody>
-          <a:bodyPr rtlCol="0" anchor="t" wrap="square" lIns="128016" rIns="128016" tIns="54864" bIns="54864"/>
-          <a:lstStyle/>
-          <a:p>
-            <a:pPr algn="l"/>
-            <a:r>
-              <a:rPr sz="1850" b="1">
+          <a:bodyPr rtlCol="0" anchor="ctr" wrap="square"/>
+          <a:lstStyle/>
+          <a:p>
+            <a:pPr algn="ctr"/>
+            <a:r>
+              <a:rPr sz="1700" b="1">
                 <a:solidFill>
                   <a:srgbClr val="00A087"/>
                 </a:solidFill>
-                <a:latin typeface="Times New Roman"/>
+                <a:latin typeface="Comic Sans MS"/>
               </a:rPr>
-              <a:t>§5  </a:t>
-            </a:r>
-            <a:r>
-              <a:rPr sz="1850" b="1">
+              <a:t>§ 5  </a:t>
+            </a:r>
+            <a:r>
+              <a:rPr sz="1700" b="1">
                 <a:solidFill>
-                  <a:srgbClr val="222222"/>
+                  <a:srgbClr val="1F1F1F"/>
                 </a:solidFill>
-                <a:latin typeface="Times New Roman"/>
+                <a:latin typeface="Comic Sans MS"/>
               </a:rPr>
               <a:t>General Time Series Harness</a:t>
             </a:r>
           </a:p>
-          <a:p>
-            <a:pPr algn="l"/>
-            <a:r>
-              <a:rPr sz="1450" b="0">
-                <a:solidFill>
-                  <a:srgbClr val="5C5C5C"/>
-                </a:solidFill>
-                <a:latin typeface="Times New Roman"/>
-              </a:rPr>
-              <a:t>data management</a:t>
-            </a:r>
-          </a:p>
-          <a:p>
-            <a:pPr algn="l"/>
-            <a:r>
-              <a:rPr sz="1450" b="0">
-                <a:solidFill>
-                  <a:srgbClr val="5C5C5C"/>
-                </a:solidFill>
-                <a:latin typeface="Times New Roman"/>
-              </a:rPr>
-              <a:t>temporal processing</a:t>
-            </a:r>
-          </a:p>
-          <a:p>
-            <a:pPr algn="l"/>
-            <a:r>
-              <a:rPr sz="1450" b="0">
-                <a:solidFill>
-                  <a:srgbClr val="5C5C5C"/>
-                </a:solidFill>
-                <a:latin typeface="Times New Roman"/>
-              </a:rPr>
-              <a:t>context and memory</a:t>
-            </a:r>
-          </a:p>
-          <a:p>
-            <a:pPr algn="l"/>
-            <a:r>
-              <a:rPr sz="1450" b="0">
-                <a:solidFill>
-                  <a:srgbClr val="5C5C5C"/>
-                </a:solidFill>
-                <a:latin typeface="Times New Roman"/>
-              </a:rPr>
-              <a:t>temporal validation</a:t>
-            </a:r>
-          </a:p>
-        </p:txBody>
-      </p:sp>
-      <p:sp>
-        <p:nvSpPr>
-          <p:cNvPr id="16" name="Rectangle 15"/>
+        </p:txBody>
+      </p:sp>
+      <p:sp>
+        <p:nvSpPr>
+          <p:cNvPr id="9" name="Rounded Rectangle 8"/>
           <p:cNvSpPr/>
           <p:nvPr/>
         </p:nvSpPr>
         <p:spPr>
           <a:xfrm>
-            <a:off x="7406640" y="1938528"/>
-            <a:ext cx="64008" cy="1563624"/>
-          </a:xfrm>
-          <a:prstGeom prst="rect">
-            <a:avLst/>
-          </a:prstGeom>
-          <a:solidFill>
-            <a:srgbClr val="00A087"/>
-          </a:solidFill>
-          <a:ln>
-            <a:noFill/>
-          </a:ln>
-          <a:effectLst/>
-        </p:spPr>
-        <p:style>
-          <a:lnRef idx="1">
-            <a:schemeClr val="accent1"/>
-          </a:lnRef>
-          <a:fillRef idx="3">
-            <a:schemeClr val="accent1"/>
-          </a:fillRef>
-          <a:effectRef idx="2">
-            <a:schemeClr val="accent1"/>
-          </a:effectRef>
-          <a:fontRef idx="minor">
-            <a:schemeClr val="lt1"/>
-          </a:fontRef>
-        </p:style>
-        <p:txBody>
-          <a:bodyPr rtlCol="0" anchor="ctr"/>
-          <a:lstStyle/>
-          <a:p>
-            <a:pPr algn="ctr"/>
-          </a:p>
-        </p:txBody>
-      </p:sp>
-      <p:sp>
-        <p:nvSpPr>
-          <p:cNvPr id="17" name="Rounded Rectangle 16"/>
-          <p:cNvSpPr/>
-          <p:nvPr/>
-        </p:nvSpPr>
-        <p:spPr>
-          <a:xfrm>
-            <a:off x="10158984" y="1828800"/>
-            <a:ext cx="2368295" cy="1783080"/>
+            <a:off x="4526280" y="2770632"/>
+            <a:ext cx="3246120" cy="749808"/>
           </a:xfrm>
           <a:prstGeom prst="roundRect">
             <a:avLst>
-              <a:gd name="adj" fmla="val 8000"/>
+              <a:gd name="adj" fmla="val 12000"/>
             </a:avLst>
           </a:prstGeom>
           <a:solidFill>
-            <a:srgbClr val="FFFFFF"/>
+            <a:srgbClr val="FBE5E0"/>
           </a:solidFill>
-          <a:ln w="15875">
+          <a:ln w="25400">
             <a:solidFill>
               <a:srgbClr val="E64B35"/>
             </a:solidFill>
@@ -4030,98 +3548,161 @@
           </a:fontRef>
         </p:style>
         <p:txBody>
-          <a:bodyPr rtlCol="0" anchor="t" wrap="square" lIns="128016" rIns="128016" tIns="54864" bIns="54864"/>
-          <a:lstStyle/>
-          <a:p>
-            <a:pPr algn="l"/>
-            <a:r>
-              <a:rPr sz="1850" b="1">
+          <a:bodyPr rtlCol="0" anchor="ctr" wrap="square"/>
+          <a:lstStyle/>
+          <a:p>
+            <a:pPr algn="ctr"/>
+            <a:r>
+              <a:rPr sz="1700" b="1">
                 <a:solidFill>
                   <a:srgbClr val="E64B35"/>
                 </a:solidFill>
-                <a:latin typeface="Times New Roman"/>
+                <a:latin typeface="Comic Sans MS"/>
               </a:rPr>
-              <a:t>§6  </a:t>
-            </a:r>
-            <a:r>
-              <a:rPr sz="1850" b="1">
+              <a:t>§ 6  </a:t>
+            </a:r>
+            <a:r>
+              <a:rPr sz="1700" b="1">
                 <a:solidFill>
-                  <a:srgbClr val="222222"/>
+                  <a:srgbClr val="1F1F1F"/>
                 </a:solidFill>
-                <a:latin typeface="Times New Roman"/>
+                <a:latin typeface="Comic Sans MS"/>
               </a:rPr>
               <a:t>Task-Specific Harness</a:t>
             </a:r>
           </a:p>
-          <a:p>
-            <a:pPr algn="l"/>
-            <a:r>
-              <a:rPr sz="1450" b="0">
-                <a:solidFill>
-                  <a:srgbClr val="5C5C5C"/>
-                </a:solidFill>
-                <a:latin typeface="Times New Roman"/>
-              </a:rPr>
-              <a:t>forecasting</a:t>
-            </a:r>
-          </a:p>
-          <a:p>
-            <a:pPr algn="l"/>
-            <a:r>
-              <a:rPr sz="1450" b="0">
-                <a:solidFill>
-                  <a:srgbClr val="5C5C5C"/>
-                </a:solidFill>
-                <a:latin typeface="Times New Roman"/>
-              </a:rPr>
-              <a:t>synthesis</a:t>
-            </a:r>
-          </a:p>
-          <a:p>
-            <a:pPr algn="l"/>
-            <a:r>
-              <a:rPr sz="1450" b="0">
-                <a:solidFill>
-                  <a:srgbClr val="5C5C5C"/>
-                </a:solidFill>
-                <a:latin typeface="Times New Roman"/>
-              </a:rPr>
-              <a:t>anomaly diagnosis</a:t>
-            </a:r>
-          </a:p>
-          <a:p>
-            <a:pPr algn="l"/>
-            <a:r>
-              <a:rPr sz="1450" b="0">
-                <a:solidFill>
-                  <a:srgbClr val="5C5C5C"/>
-                </a:solidFill>
-                <a:latin typeface="Times New Roman"/>
-              </a:rPr>
-              <a:t>decision support</a:t>
-            </a:r>
-          </a:p>
-        </p:txBody>
-      </p:sp>
-      <p:sp>
-        <p:nvSpPr>
-          <p:cNvPr id="18" name="Rectangle 17"/>
-          <p:cNvSpPr/>
+        </p:txBody>
+      </p:sp>
+      <p:cxnSp>
+        <p:nvCxnSpPr>
+          <p:cNvPr id="10" name="Connector 9"/>
+          <p:cNvCxnSpPr/>
           <p:nvPr/>
-        </p:nvSpPr>
+        </p:nvCxnSpPr>
         <p:spPr>
           <a:xfrm>
-            <a:off x="10177272" y="1938528"/>
-            <a:ext cx="64008" cy="1563624"/>
+            <a:off x="7973568" y="960120"/>
+            <a:ext cx="0" cy="2468880"/>
+          </a:xfrm>
+          <a:prstGeom prst="line">
+            <a:avLst/>
+          </a:prstGeom>
+          <a:ln w="19050">
+            <a:solidFill>
+              <a:srgbClr val="767670"/>
+            </a:solidFill>
+            <a:tailEnd type="triangle" w="med" len="med"/>
+          </a:ln>
+        </p:spPr>
+        <p:style>
+          <a:lnRef idx="2">
+            <a:schemeClr val="accent1"/>
+          </a:lnRef>
+          <a:fillRef idx="0">
+            <a:schemeClr val="accent1"/>
+          </a:fillRef>
+          <a:effectRef idx="1">
+            <a:schemeClr val="accent1"/>
+          </a:effectRef>
+          <a:fontRef idx="minor">
+            <a:schemeClr val="tx1"/>
+          </a:fontRef>
+        </p:style>
+      </p:cxnSp>
+      <p:sp>
+        <p:nvSpPr>
+          <p:cNvPr id="11" name="TextBox 10"/>
+          <p:cNvSpPr txBox="1"/>
+          <p:nvPr/>
+        </p:nvSpPr>
+        <p:spPr>
+          <a:xfrm rot="5400000">
+            <a:off x="7269480" y="2039112"/>
+            <a:ext cx="1783080" cy="310896"/>
           </a:xfrm>
           <a:prstGeom prst="rect">
             <a:avLst/>
           </a:prstGeom>
+          <a:noFill/>
+        </p:spPr>
+        <p:txBody>
+          <a:bodyPr wrap="square" anchor="ctr">
+            <a:spAutoFit/>
+          </a:bodyPr>
+          <a:lstStyle/>
+          <a:p>
+            <a:pPr algn="ctr"/>
+            <a:r>
+              <a:rPr sz="1250" b="1">
+                <a:solidFill>
+                  <a:srgbClr val="767670"/>
+                </a:solidFill>
+                <a:latin typeface="Arial"/>
+              </a:rPr>
+              <a:t>general to specific</a:t>
+            </a:r>
+          </a:p>
+        </p:txBody>
+      </p:sp>
+      <p:sp>
+        <p:nvSpPr>
+          <p:cNvPr id="12" name="TextBox 11"/>
+          <p:cNvSpPr txBox="1"/>
+          <p:nvPr/>
+        </p:nvSpPr>
+        <p:spPr>
+          <a:xfrm>
+            <a:off x="8823960" y="228600"/>
+            <a:ext cx="1920240" cy="457200"/>
+          </a:xfrm>
+          <a:prstGeom prst="rect">
+            <a:avLst/>
+          </a:prstGeom>
+          <a:noFill/>
+        </p:spPr>
+        <p:txBody>
+          <a:bodyPr wrap="square" anchor="ctr">
+            <a:spAutoFit/>
+          </a:bodyPr>
+          <a:lstStyle/>
+          <a:p>
+            <a:pPr algn="ctr"/>
+            <a:r>
+              <a:rPr sz="2000" b="1">
+                <a:solidFill>
+                  <a:srgbClr val="304B63"/>
+                </a:solidFill>
+                <a:latin typeface="Comic Sans MS"/>
+              </a:rPr>
+              <a:t>Evaluate</a:t>
+            </a:r>
+          </a:p>
+        </p:txBody>
+      </p:sp>
+      <p:sp>
+        <p:nvSpPr>
+          <p:cNvPr id="13" name="Rounded Rectangle 12"/>
+          <p:cNvSpPr/>
+          <p:nvPr/>
+        </p:nvSpPr>
+        <p:spPr>
+          <a:xfrm>
+            <a:off x="8823960" y="1371600"/>
+            <a:ext cx="1920240" cy="1645920"/>
+          </a:xfrm>
+          <a:prstGeom prst="roundRect">
+            <a:avLst>
+              <a:gd name="adj" fmla="val 12000"/>
+            </a:avLst>
+          </a:prstGeom>
           <a:solidFill>
-            <a:srgbClr val="E64B35"/>
+            <a:srgbClr val="F1F1EE"/>
           </a:solidFill>
-          <a:ln>
-            <a:noFill/>
+          <a:ln w="25400">
+            <a:solidFill>
+              <a:srgbClr val="304B63"/>
+            </a:solidFill>
+            <a:prstDash val="dash"/>
           </a:ln>
           <a:effectLst/>
         </p:spPr>
@@ -4140,13 +3721,281 @@
           </a:fontRef>
         </p:style>
         <p:txBody>
-          <a:bodyPr rtlCol="0" anchor="ctr"/>
+          <a:bodyPr rtlCol="0" anchor="ctr" wrap="square"/>
           <a:lstStyle/>
           <a:p>
             <a:pPr algn="ctr"/>
-          </a:p>
-        </p:txBody>
-      </p:sp>
+            <a:r>
+              <a:rPr sz="1700" b="1">
+                <a:solidFill>
+                  <a:srgbClr val="304B63"/>
+                </a:solidFill>
+                <a:latin typeface="Comic Sans MS"/>
+              </a:rPr>
+              <a:t>§ 7</a:t>
+            </a:r>
+          </a:p>
+          <a:p>
+            <a:pPr algn="ctr"/>
+            <a:r>
+              <a:rPr sz="1700" b="1">
+                <a:solidFill>
+                  <a:srgbClr val="1F1F1F"/>
+                </a:solidFill>
+                <a:latin typeface="Comic Sans MS"/>
+              </a:rPr>
+              <a:t>Infrastructure and Benchmarks</a:t>
+            </a:r>
+          </a:p>
+        </p:txBody>
+      </p:sp>
+      <p:sp>
+        <p:nvSpPr>
+          <p:cNvPr id="14" name="TextBox 13"/>
+          <p:cNvSpPr txBox="1"/>
+          <p:nvPr/>
+        </p:nvSpPr>
+        <p:spPr>
+          <a:xfrm>
+            <a:off x="11247120" y="228600"/>
+            <a:ext cx="1463040" cy="457200"/>
+          </a:xfrm>
+          <a:prstGeom prst="rect">
+            <a:avLst/>
+          </a:prstGeom>
+          <a:noFill/>
+        </p:spPr>
+        <p:txBody>
+          <a:bodyPr wrap="square" anchor="ctr">
+            <a:spAutoFit/>
+          </a:bodyPr>
+          <a:lstStyle/>
+          <a:p>
+            <a:pPr algn="ctr"/>
+            <a:r>
+              <a:rPr sz="2000" b="1">
+                <a:solidFill>
+                  <a:srgbClr val="304B63"/>
+                </a:solidFill>
+                <a:latin typeface="Comic Sans MS"/>
+              </a:rPr>
+              <a:t>Advance</a:t>
+            </a:r>
+          </a:p>
+        </p:txBody>
+      </p:sp>
+      <p:sp>
+        <p:nvSpPr>
+          <p:cNvPr id="15" name="Rounded Rectangle 14"/>
+          <p:cNvSpPr/>
+          <p:nvPr/>
+        </p:nvSpPr>
+        <p:spPr>
+          <a:xfrm>
+            <a:off x="11247120" y="868680"/>
+            <a:ext cx="1463040" cy="1143000"/>
+          </a:xfrm>
+          <a:prstGeom prst="roundRect">
+            <a:avLst>
+              <a:gd name="adj" fmla="val 12000"/>
+            </a:avLst>
+          </a:prstGeom>
+          <a:solidFill>
+            <a:srgbClr val="F1F1EE"/>
+          </a:solidFill>
+          <a:ln w="25400">
+            <a:solidFill>
+              <a:srgbClr val="304B63"/>
+            </a:solidFill>
+            <a:prstDash val="dash"/>
+          </a:ln>
+          <a:effectLst/>
+        </p:spPr>
+        <p:style>
+          <a:lnRef idx="1">
+            <a:schemeClr val="accent1"/>
+          </a:lnRef>
+          <a:fillRef idx="3">
+            <a:schemeClr val="accent1"/>
+          </a:fillRef>
+          <a:effectRef idx="2">
+            <a:schemeClr val="accent1"/>
+          </a:effectRef>
+          <a:fontRef idx="minor">
+            <a:schemeClr val="lt1"/>
+          </a:fontRef>
+        </p:style>
+        <p:txBody>
+          <a:bodyPr rtlCol="0" anchor="ctr" wrap="square"/>
+          <a:lstStyle/>
+          <a:p>
+            <a:pPr algn="ctr"/>
+            <a:r>
+              <a:rPr sz="1700" b="1">
+                <a:solidFill>
+                  <a:srgbClr val="304B63"/>
+                </a:solidFill>
+                <a:latin typeface="Comic Sans MS"/>
+              </a:rPr>
+              <a:t>§ 8</a:t>
+            </a:r>
+          </a:p>
+          <a:p>
+            <a:pPr algn="ctr"/>
+            <a:r>
+              <a:rPr sz="1700" b="1">
+                <a:solidFill>
+                  <a:srgbClr val="1F1F1F"/>
+                </a:solidFill>
+                <a:latin typeface="Comic Sans MS"/>
+              </a:rPr>
+              <a:t>Open Problems</a:t>
+            </a:r>
+          </a:p>
+        </p:txBody>
+      </p:sp>
+      <p:sp>
+        <p:nvSpPr>
+          <p:cNvPr id="16" name="Rounded Rectangle 15"/>
+          <p:cNvSpPr/>
+          <p:nvPr/>
+        </p:nvSpPr>
+        <p:spPr>
+          <a:xfrm>
+            <a:off x="11247120" y="2377440"/>
+            <a:ext cx="1463040" cy="1143000"/>
+          </a:xfrm>
+          <a:prstGeom prst="roundRect">
+            <a:avLst>
+              <a:gd name="adj" fmla="val 12000"/>
+            </a:avLst>
+          </a:prstGeom>
+          <a:solidFill>
+            <a:srgbClr val="F1F1EE"/>
+          </a:solidFill>
+          <a:ln w="25400">
+            <a:solidFill>
+              <a:srgbClr val="304B63"/>
+            </a:solidFill>
+            <a:prstDash val="dash"/>
+          </a:ln>
+          <a:effectLst/>
+        </p:spPr>
+        <p:style>
+          <a:lnRef idx="1">
+            <a:schemeClr val="accent1"/>
+          </a:lnRef>
+          <a:fillRef idx="3">
+            <a:schemeClr val="accent1"/>
+          </a:fillRef>
+          <a:effectRef idx="2">
+            <a:schemeClr val="accent1"/>
+          </a:effectRef>
+          <a:fontRef idx="minor">
+            <a:schemeClr val="lt1"/>
+          </a:fontRef>
+        </p:style>
+        <p:txBody>
+          <a:bodyPr rtlCol="0" anchor="ctr" wrap="square"/>
+          <a:lstStyle/>
+          <a:p>
+            <a:pPr algn="ctr"/>
+            <a:r>
+              <a:rPr sz="1700" b="1">
+                <a:solidFill>
+                  <a:srgbClr val="304B63"/>
+                </a:solidFill>
+                <a:latin typeface="Comic Sans MS"/>
+              </a:rPr>
+              <a:t>§ 9</a:t>
+            </a:r>
+          </a:p>
+          <a:p>
+            <a:pPr algn="ctr"/>
+            <a:r>
+              <a:rPr sz="1700" b="1">
+                <a:solidFill>
+                  <a:srgbClr val="1F1F1F"/>
+                </a:solidFill>
+                <a:latin typeface="Comic Sans MS"/>
+              </a:rPr>
+              <a:t>Conclusion</a:t>
+            </a:r>
+          </a:p>
+        </p:txBody>
+      </p:sp>
+      <p:cxnSp>
+        <p:nvCxnSpPr>
+          <p:cNvPr id="17" name="Connector 16"/>
+          <p:cNvCxnSpPr/>
+          <p:nvPr/>
+        </p:nvCxnSpPr>
+        <p:spPr>
+          <a:xfrm>
+            <a:off x="2633472" y="2194560"/>
+            <a:ext cx="384048" cy="0"/>
+          </a:xfrm>
+          <a:prstGeom prst="line">
+            <a:avLst/>
+          </a:prstGeom>
+          <a:ln w="28575">
+            <a:solidFill>
+              <a:srgbClr val="304B63"/>
+            </a:solidFill>
+            <a:tailEnd type="triangle" w="med" len="med"/>
+          </a:ln>
+        </p:spPr>
+        <p:style>
+          <a:lnRef idx="2">
+            <a:schemeClr val="accent1"/>
+          </a:lnRef>
+          <a:fillRef idx="0">
+            <a:schemeClr val="accent1"/>
+          </a:fillRef>
+          <a:effectRef idx="1">
+            <a:schemeClr val="accent1"/>
+          </a:effectRef>
+          <a:fontRef idx="minor">
+            <a:schemeClr val="tx1"/>
+          </a:fontRef>
+        </p:style>
+      </p:cxnSp>
+      <p:cxnSp>
+        <p:nvCxnSpPr>
+          <p:cNvPr id="18" name="Connector 17"/>
+          <p:cNvCxnSpPr/>
+          <p:nvPr/>
+        </p:nvCxnSpPr>
+        <p:spPr>
+          <a:xfrm>
+            <a:off x="8366760" y="2194560"/>
+            <a:ext cx="411480" cy="0"/>
+          </a:xfrm>
+          <a:prstGeom prst="line">
+            <a:avLst/>
+          </a:prstGeom>
+          <a:ln w="28575">
+            <a:solidFill>
+              <a:srgbClr val="304B63"/>
+            </a:solidFill>
+            <a:tailEnd type="triangle" w="med" len="med"/>
+          </a:ln>
+        </p:spPr>
+        <p:style>
+          <a:lnRef idx="2">
+            <a:schemeClr val="accent1"/>
+          </a:lnRef>
+          <a:fillRef idx="0">
+            <a:schemeClr val="accent1"/>
+          </a:fillRef>
+          <a:effectRef idx="1">
+            <a:schemeClr val="accent1"/>
+          </a:effectRef>
+          <a:fontRef idx="minor">
+            <a:schemeClr val="tx1"/>
+          </a:fontRef>
+        </p:style>
+      </p:cxnSp>
       <p:cxnSp>
         <p:nvCxnSpPr>
           <p:cNvPr id="19" name="Connector 18"/>
@@ -4155,15 +4004,15 @@
         </p:nvCxnSpPr>
         <p:spPr>
           <a:xfrm>
-            <a:off x="7077456" y="2720340"/>
-            <a:ext cx="274320" cy="0"/>
+            <a:off x="10789920" y="2194560"/>
+            <a:ext cx="411480" cy="0"/>
           </a:xfrm>
           <a:prstGeom prst="line">
             <a:avLst/>
           </a:prstGeom>
-          <a:ln w="19050">
+          <a:ln w="28575">
             <a:solidFill>
-              <a:srgbClr val="6B6B6B"/>
+              <a:srgbClr val="304B63"/>
             </a:solidFill>
             <a:tailEnd type="triangle" w="med" len="med"/>
           </a:ln>
@@ -4191,17 +4040,17 @@
         </p:nvCxnSpPr>
         <p:spPr>
           <a:xfrm>
-            <a:off x="9848088" y="2720340"/>
-            <a:ext cx="274320" cy="0"/>
+            <a:off x="9784080" y="3035808"/>
+            <a:ext cx="0" cy="914400"/>
           </a:xfrm>
           <a:prstGeom prst="line">
             <a:avLst/>
           </a:prstGeom>
           <a:ln w="19050">
             <a:solidFill>
-              <a:srgbClr val="6B6B6B"/>
+              <a:srgbClr val="767670"/>
             </a:solidFill>
-            <a:tailEnd type="triangle" w="med" len="med"/>
+            <a:prstDash val="dash"/>
           </a:ln>
         </p:spPr>
         <p:style>
@@ -4226,17 +4075,18 @@
           <p:nvPr/>
         </p:nvCxnSpPr>
         <p:spPr>
-          <a:xfrm>
-            <a:off x="274320" y="3794760"/>
-            <a:ext cx="12252960" cy="0"/>
+          <a:xfrm flipH="1">
+            <a:off x="6144768" y="3950208"/>
+            <a:ext cx="3639312" cy="0"/>
           </a:xfrm>
           <a:prstGeom prst="line">
             <a:avLst/>
           </a:prstGeom>
-          <a:ln w="9525">
+          <a:ln w="19050">
             <a:solidFill>
-              <a:srgbClr val="C9C9C9"/>
+              <a:srgbClr val="767670"/>
             </a:solidFill>
+            <a:prstDash val="dash"/>
           </a:ln>
         </p:spPr>
         <p:style>
@@ -4254,16 +4104,53 @@
           </a:fontRef>
         </p:style>
       </p:cxnSp>
-      <p:sp>
-        <p:nvSpPr>
-          <p:cNvPr id="22" name="TextBox 21"/>
+      <p:cxnSp>
+        <p:nvCxnSpPr>
+          <p:cNvPr id="22" name="Connector 21"/>
+          <p:cNvCxnSpPr/>
+          <p:nvPr/>
+        </p:nvCxnSpPr>
+        <p:spPr>
+          <a:xfrm flipV="1">
+            <a:off x="6144768" y="3557016"/>
+            <a:ext cx="0" cy="393192"/>
+          </a:xfrm>
+          <a:prstGeom prst="line">
+            <a:avLst/>
+          </a:prstGeom>
+          <a:ln w="19050">
+            <a:solidFill>
+              <a:srgbClr val="767670"/>
+            </a:solidFill>
+            <a:prstDash val="dash"/>
+            <a:tailEnd type="triangle" w="med" len="med"/>
+          </a:ln>
+        </p:spPr>
+        <p:style>
+          <a:lnRef idx="2">
+            <a:schemeClr val="accent1"/>
+          </a:lnRef>
+          <a:fillRef idx="0">
+            <a:schemeClr val="accent1"/>
+          </a:fillRef>
+          <a:effectRef idx="1">
+            <a:schemeClr val="accent1"/>
+          </a:effectRef>
+          <a:fontRef idx="minor">
+            <a:schemeClr val="tx1"/>
+          </a:fontRef>
+        </p:style>
+      </p:cxnSp>
+      <p:sp>
+        <p:nvSpPr>
+          <p:cNvPr id="23" name="TextBox 22"/>
           <p:cNvSpPr txBox="1"/>
           <p:nvPr/>
         </p:nvSpPr>
         <p:spPr>
           <a:xfrm>
-            <a:off x="274320" y="3931920"/>
-            <a:ext cx="1325880" cy="822960"/>
+            <a:off x="6903720" y="3931920"/>
+            <a:ext cx="2103120" cy="329184"/>
           </a:xfrm>
           <a:prstGeom prst="rect">
             <a:avLst/>
@@ -4271,457 +4158,21 @@
           <a:noFill/>
         </p:spPr>
         <p:txBody>
-          <a:bodyPr wrap="square" anchor="ctr" lIns="128016" rIns="128016" tIns="54864" bIns="54864">
+          <a:bodyPr wrap="square" anchor="ctr">
             <a:spAutoFit/>
           </a:bodyPr>
           <a:lstStyle/>
           <a:p>
-            <a:pPr algn="l"/>
-            <a:r>
-              <a:rPr sz="1450" b="1">
+            <a:pPr algn="ctr"/>
+            <a:r>
+              <a:rPr sz="1250" b="1">
                 <a:solidFill>
-                  <a:srgbClr val="5C5C5C"/>
+                  <a:srgbClr val="767670"/>
                 </a:solidFill>
-                <a:latin typeface="Times New Roman"/>
+                <a:latin typeface="Arial"/>
               </a:rPr>
-              <a:t>Evaluation</a:t>
-            </a:r>
-          </a:p>
-        </p:txBody>
-      </p:sp>
-      <p:sp>
-        <p:nvSpPr>
-          <p:cNvPr id="23" name="Rounded Rectangle 22"/>
-          <p:cNvSpPr/>
-          <p:nvPr/>
-        </p:nvSpPr>
-        <p:spPr>
-          <a:xfrm>
-            <a:off x="1600200" y="3913632"/>
-            <a:ext cx="10927080" cy="777240"/>
-          </a:xfrm>
-          <a:prstGeom prst="roundRect">
-            <a:avLst>
-              <a:gd name="adj" fmla="val 8000"/>
-            </a:avLst>
-          </a:prstGeom>
-          <a:solidFill>
-            <a:srgbClr val="FFFFFF"/>
-          </a:solidFill>
-          <a:ln w="15875">
-            <a:solidFill>
-              <a:srgbClr val="6B6B6B"/>
-            </a:solidFill>
-          </a:ln>
-          <a:effectLst/>
-        </p:spPr>
-        <p:style>
-          <a:lnRef idx="1">
-            <a:schemeClr val="accent1"/>
-          </a:lnRef>
-          <a:fillRef idx="3">
-            <a:schemeClr val="accent1"/>
-          </a:fillRef>
-          <a:effectRef idx="2">
-            <a:schemeClr val="accent1"/>
-          </a:effectRef>
-          <a:fontRef idx="minor">
-            <a:schemeClr val="lt1"/>
-          </a:fontRef>
-        </p:style>
-        <p:txBody>
-          <a:bodyPr rtlCol="0" anchor="ctr" wrap="square" lIns="128016" rIns="128016" tIns="54864" bIns="54864"/>
-          <a:lstStyle/>
-          <a:p>
-            <a:pPr algn="l"/>
-            <a:r>
-              <a:rPr sz="1850" b="1">
-                <a:solidFill>
-                  <a:srgbClr val="6B6B6B"/>
-                </a:solidFill>
-                <a:latin typeface="Times New Roman"/>
-              </a:rPr>
-              <a:t>§7  </a:t>
-            </a:r>
-            <a:r>
-              <a:rPr sz="1850" b="1">
-                <a:solidFill>
-                  <a:srgbClr val="222222"/>
-                </a:solidFill>
-                <a:latin typeface="Times New Roman"/>
-              </a:rPr>
-              <a:t>Infrastructure and Benchmarks</a:t>
-            </a:r>
-          </a:p>
-          <a:p>
-            <a:pPr algn="l"/>
-            <a:r>
-              <a:rPr sz="1450" b="0">
-                <a:solidFill>
-                  <a:srgbClr val="5C5C5C"/>
-                </a:solidFill>
-                <a:latin typeface="Times New Roman"/>
-              </a:rPr>
-              <a:t>evaluation contract · benchmark landscape · temporal question answering · reproducible infrastructure · benchmark selection</a:t>
-            </a:r>
-          </a:p>
-        </p:txBody>
-      </p:sp>
-      <p:sp>
-        <p:nvSpPr>
-          <p:cNvPr id="24" name="Rectangle 23"/>
-          <p:cNvSpPr/>
-          <p:nvPr/>
-        </p:nvSpPr>
-        <p:spPr>
-          <a:xfrm>
-            <a:off x="1618488" y="4023360"/>
-            <a:ext cx="64008" cy="557784"/>
-          </a:xfrm>
-          <a:prstGeom prst="rect">
-            <a:avLst/>
-          </a:prstGeom>
-          <a:solidFill>
-            <a:srgbClr val="6B6B6B"/>
-          </a:solidFill>
-          <a:ln>
-            <a:noFill/>
-          </a:ln>
-          <a:effectLst/>
-        </p:spPr>
-        <p:style>
-          <a:lnRef idx="1">
-            <a:schemeClr val="accent1"/>
-          </a:lnRef>
-          <a:fillRef idx="3">
-            <a:schemeClr val="accent1"/>
-          </a:fillRef>
-          <a:effectRef idx="2">
-            <a:schemeClr val="accent1"/>
-          </a:effectRef>
-          <a:fontRef idx="minor">
-            <a:schemeClr val="lt1"/>
-          </a:fontRef>
-        </p:style>
-        <p:txBody>
-          <a:bodyPr rtlCol="0" anchor="ctr"/>
-          <a:lstStyle/>
-          <a:p>
-            <a:pPr algn="ctr"/>
-          </a:p>
-        </p:txBody>
-      </p:sp>
-      <p:cxnSp>
-        <p:nvCxnSpPr>
-          <p:cNvPr id="25" name="Connector 24"/>
-          <p:cNvCxnSpPr/>
-          <p:nvPr/>
-        </p:nvCxnSpPr>
-        <p:spPr>
-          <a:xfrm>
-            <a:off x="274320" y="4873752"/>
-            <a:ext cx="12252960" cy="0"/>
-          </a:xfrm>
-          <a:prstGeom prst="line">
-            <a:avLst/>
-          </a:prstGeom>
-          <a:ln w="9525">
-            <a:solidFill>
-              <a:srgbClr val="C9C9C9"/>
-            </a:solidFill>
-          </a:ln>
-        </p:spPr>
-        <p:style>
-          <a:lnRef idx="2">
-            <a:schemeClr val="accent1"/>
-          </a:lnRef>
-          <a:fillRef idx="0">
-            <a:schemeClr val="accent1"/>
-          </a:fillRef>
-          <a:effectRef idx="1">
-            <a:schemeClr val="accent1"/>
-          </a:effectRef>
-          <a:fontRef idx="minor">
-            <a:schemeClr val="tx1"/>
-          </a:fontRef>
-        </p:style>
-      </p:cxnSp>
-      <p:sp>
-        <p:nvSpPr>
-          <p:cNvPr id="26" name="TextBox 25"/>
-          <p:cNvSpPr txBox="1"/>
-          <p:nvPr/>
-        </p:nvSpPr>
-        <p:spPr>
-          <a:xfrm>
-            <a:off x="274320" y="5029200"/>
-            <a:ext cx="1325880" cy="822960"/>
-          </a:xfrm>
-          <a:prstGeom prst="rect">
-            <a:avLst/>
-          </a:prstGeom>
-          <a:noFill/>
-        </p:spPr>
-        <p:txBody>
-          <a:bodyPr wrap="square" anchor="ctr" lIns="128016" rIns="128016" tIns="54864" bIns="54864">
-            <a:spAutoFit/>
-          </a:bodyPr>
-          <a:lstStyle/>
-          <a:p>
-            <a:pPr algn="l"/>
-            <a:r>
-              <a:rPr sz="1450" b="1">
-                <a:solidFill>
-                  <a:srgbClr val="5C5C5C"/>
-                </a:solidFill>
-                <a:latin typeface="Times New Roman"/>
-              </a:rPr>
-              <a:t>Outlook</a:t>
-            </a:r>
-          </a:p>
-        </p:txBody>
-      </p:sp>
-      <p:sp>
-        <p:nvSpPr>
-          <p:cNvPr id="27" name="Rounded Rectangle 26"/>
-          <p:cNvSpPr/>
-          <p:nvPr/>
-        </p:nvSpPr>
-        <p:spPr>
-          <a:xfrm>
-            <a:off x="1600200" y="5010912"/>
-            <a:ext cx="6035040" cy="777240"/>
-          </a:xfrm>
-          <a:prstGeom prst="roundRect">
-            <a:avLst>
-              <a:gd name="adj" fmla="val 8000"/>
-            </a:avLst>
-          </a:prstGeom>
-          <a:solidFill>
-            <a:srgbClr val="FFFFFF"/>
-          </a:solidFill>
-          <a:ln w="15875">
-            <a:solidFill>
-              <a:srgbClr val="6B6B6B"/>
-            </a:solidFill>
-          </a:ln>
-          <a:effectLst/>
-        </p:spPr>
-        <p:style>
-          <a:lnRef idx="1">
-            <a:schemeClr val="accent1"/>
-          </a:lnRef>
-          <a:fillRef idx="3">
-            <a:schemeClr val="accent1"/>
-          </a:fillRef>
-          <a:effectRef idx="2">
-            <a:schemeClr val="accent1"/>
-          </a:effectRef>
-          <a:fontRef idx="minor">
-            <a:schemeClr val="lt1"/>
-          </a:fontRef>
-        </p:style>
-        <p:txBody>
-          <a:bodyPr rtlCol="0" anchor="ctr" wrap="square" lIns="128016" rIns="128016" tIns="54864" bIns="54864"/>
-          <a:lstStyle/>
-          <a:p>
-            <a:pPr algn="l"/>
-            <a:r>
-              <a:rPr sz="1850" b="1">
-                <a:solidFill>
-                  <a:srgbClr val="6B6B6B"/>
-                </a:solidFill>
-                <a:latin typeface="Times New Roman"/>
-              </a:rPr>
-              <a:t>§8  </a:t>
-            </a:r>
-            <a:r>
-              <a:rPr sz="1850" b="1">
-                <a:solidFill>
-                  <a:srgbClr val="222222"/>
-                </a:solidFill>
-                <a:latin typeface="Times New Roman"/>
-              </a:rPr>
-              <a:t>Open Problems and System Analyses</a:t>
-            </a:r>
-          </a:p>
-          <a:p>
-            <a:pPr algn="l"/>
-            <a:r>
-              <a:rPr sz="1450" b="0">
-                <a:solidFill>
-                  <a:srgbClr val="5C5C5C"/>
-                </a:solidFill>
-                <a:latin typeface="Times New Roman"/>
-              </a:rPr>
-              <a:t>reusable temporal infrastructure · open problems · design implications</a:t>
-            </a:r>
-          </a:p>
-        </p:txBody>
-      </p:sp>
-      <p:sp>
-        <p:nvSpPr>
-          <p:cNvPr id="28" name="Rectangle 27"/>
-          <p:cNvSpPr/>
-          <p:nvPr/>
-        </p:nvSpPr>
-        <p:spPr>
-          <a:xfrm>
-            <a:off x="1618488" y="5120640"/>
-            <a:ext cx="64008" cy="557784"/>
-          </a:xfrm>
-          <a:prstGeom prst="rect">
-            <a:avLst/>
-          </a:prstGeom>
-          <a:solidFill>
-            <a:srgbClr val="6B6B6B"/>
-          </a:solidFill>
-          <a:ln>
-            <a:noFill/>
-          </a:ln>
-          <a:effectLst/>
-        </p:spPr>
-        <p:style>
-          <a:lnRef idx="1">
-            <a:schemeClr val="accent1"/>
-          </a:lnRef>
-          <a:fillRef idx="3">
-            <a:schemeClr val="accent1"/>
-          </a:fillRef>
-          <a:effectRef idx="2">
-            <a:schemeClr val="accent1"/>
-          </a:effectRef>
-          <a:fontRef idx="minor">
-            <a:schemeClr val="lt1"/>
-          </a:fontRef>
-        </p:style>
-        <p:txBody>
-          <a:bodyPr rtlCol="0" anchor="ctr"/>
-          <a:lstStyle/>
-          <a:p>
-            <a:pPr algn="ctr"/>
-          </a:p>
-        </p:txBody>
-      </p:sp>
-      <p:sp>
-        <p:nvSpPr>
-          <p:cNvPr id="29" name="Rounded Rectangle 28"/>
-          <p:cNvSpPr/>
-          <p:nvPr/>
-        </p:nvSpPr>
-        <p:spPr>
-          <a:xfrm>
-            <a:off x="7818120" y="5010912"/>
-            <a:ext cx="4709159" cy="777240"/>
-          </a:xfrm>
-          <a:prstGeom prst="roundRect">
-            <a:avLst>
-              <a:gd name="adj" fmla="val 8000"/>
-            </a:avLst>
-          </a:prstGeom>
-          <a:solidFill>
-            <a:srgbClr val="FFFFFF"/>
-          </a:solidFill>
-          <a:ln w="15875">
-            <a:solidFill>
-              <a:srgbClr val="6B6B6B"/>
-            </a:solidFill>
-          </a:ln>
-          <a:effectLst/>
-        </p:spPr>
-        <p:style>
-          <a:lnRef idx="1">
-            <a:schemeClr val="accent1"/>
-          </a:lnRef>
-          <a:fillRef idx="3">
-            <a:schemeClr val="accent1"/>
-          </a:fillRef>
-          <a:effectRef idx="2">
-            <a:schemeClr val="accent1"/>
-          </a:effectRef>
-          <a:fontRef idx="minor">
-            <a:schemeClr val="lt1"/>
-          </a:fontRef>
-        </p:style>
-        <p:txBody>
-          <a:bodyPr rtlCol="0" anchor="ctr" wrap="square" lIns="128016" rIns="128016" tIns="54864" bIns="54864"/>
-          <a:lstStyle/>
-          <a:p>
-            <a:pPr algn="l"/>
-            <a:r>
-              <a:rPr sz="1850" b="1">
-                <a:solidFill>
-                  <a:srgbClr val="6B6B6B"/>
-                </a:solidFill>
-                <a:latin typeface="Times New Roman"/>
-              </a:rPr>
-              <a:t>§9  </a:t>
-            </a:r>
-            <a:r>
-              <a:rPr sz="1850" b="1">
-                <a:solidFill>
-                  <a:srgbClr val="222222"/>
-                </a:solidFill>
-                <a:latin typeface="Times New Roman"/>
-              </a:rPr>
-              <a:t>Conclusion</a:t>
-            </a:r>
-          </a:p>
-          <a:p>
-            <a:pPr algn="l"/>
-            <a:r>
-              <a:rPr sz="1450" b="0">
-                <a:solidFill>
-                  <a:srgbClr val="5C5C5C"/>
-                </a:solidFill>
-                <a:latin typeface="Times New Roman"/>
-              </a:rPr>
-              <a:t>design judgments · alignment of the three parts</a:t>
-            </a:r>
-          </a:p>
-        </p:txBody>
-      </p:sp>
-      <p:sp>
-        <p:nvSpPr>
-          <p:cNvPr id="30" name="Rectangle 29"/>
-          <p:cNvSpPr/>
-          <p:nvPr/>
-        </p:nvSpPr>
-        <p:spPr>
-          <a:xfrm>
-            <a:off x="7836408" y="5120640"/>
-            <a:ext cx="64008" cy="557784"/>
-          </a:xfrm>
-          <a:prstGeom prst="rect">
-            <a:avLst/>
-          </a:prstGeom>
-          <a:solidFill>
-            <a:srgbClr val="6B6B6B"/>
-          </a:solidFill>
-          <a:ln>
-            <a:noFill/>
-          </a:ln>
-          <a:effectLst/>
-        </p:spPr>
-        <p:style>
-          <a:lnRef idx="1">
-            <a:schemeClr val="accent1"/>
-          </a:lnRef>
-          <a:fillRef idx="3">
-            <a:schemeClr val="accent1"/>
-          </a:fillRef>
-          <a:effectRef idx="2">
-            <a:schemeClr val="accent1"/>
-          </a:effectRef>
-          <a:fontRef idx="minor">
-            <a:schemeClr val="lt1"/>
-          </a:fontRef>
-        </p:style>
-        <p:txBody>
-          <a:bodyPr rtlCol="0" anchor="ctr"/>
-          <a:lstStyle/>
-          <a:p>
-            <a:pPr algn="ctr"/>
+              <a:t>feedback</a:t>
+            </a:r>
           </a:p>
         </p:txBody>
       </p:sp>
